--- a/Schools_ML_Track/camp_2026/slides/ML/ML09.pptx
+++ b/Schools_ML_Track/camp_2026/slides/ML/ML09.pptx
@@ -128,7 +128,7 @@
   <p:extLst>
     <p:ext uri="{521415D9-36F7-43E2-AB2F-B90AF26B5E84}">
       <p14:sectionLst xmlns:p14="http://schemas.microsoft.com/office/powerpoint/2010/main">
-        <p14:section name="Opening" id="{a4de767c-2bfb-bb42-a8d8-93838108e0ab}">
+        <p14:section name="Opening" id="{41eb9243-c8f0-47f9-ba4a-3e606267bed8}">
           <p14:sldIdLst>
             <p14:sldId id="256"/>
             <p14:sldId id="257"/>
@@ -139,7 +139,7 @@
             <p14:sldId id="262"/>
           </p14:sldIdLst>
         </p14:section>
-        <p14:section name="Block A" id="{a4c599b5-f0b0-2345-223f-81e7dff48d0c}">
+        <p14:section name="Block A" id="{427754d1-64c0-7cac-4634-909f8b222551}">
           <p14:sldIdLst>
             <p14:sldId id="263"/>
             <p14:sldId id="264"/>
@@ -149,15 +149,15 @@
             <p14:sldId id="269"/>
           </p14:sldIdLst>
         </p14:section>
-        <p14:section name="Break" id="{6f5002ff-0148-9de2-b62f-3222d093d2c6}">
+        <p14:section name="Break" id="{ea14ca70-8edb-801c-ba41-611ffc76bbc7}">
           <p14:sldIdLst>
             <p14:sldId id="267"/>
           </p14:sldIdLst>
         </p14:section>
-        <p14:section name="Block A" id="{5fa6a482-7da0-5581-de86-10a4e712d104}">
+        <p14:section name="Block A" id="{1362b2dc-35a5-d965-d9b2-1e35dbffee36}">
           <p14:sldIdLst/>
         </p14:section>
-        <p14:section name="Block B" id="{abac227c-4865-4a82-8a6d-a15ef3392049}">
+        <p14:section name="Block B" id="{8595d331-72bd-5495-1519-d8b9a38b7803}">
           <p14:sldIdLst>
             <p14:sldId id="270"/>
             <p14:sldId id="271"/>
@@ -166,7 +166,7 @@
             <p14:sldId id="274"/>
           </p14:sldIdLst>
         </p14:section>
-        <p14:section name="Make and close" id="{0215ab4e-60ee-8611-faff-f16a41f3511a}">
+        <p14:section name="Make and close" id="{b8a3e07e-e786-e6e1-3408-187a52537b2a}">
           <p14:sldIdLst>
             <p14:sldId id="275"/>
             <p14:sldId id="276"/>

--- a/Schools_ML_Track/camp_2026/slides/ML/ML09.pptx
+++ b/Schools_ML_Track/camp_2026/slides/ML/ML09.pptx
@@ -128,7 +128,7 @@
   <p:extLst>
     <p:ext uri="{521415D9-36F7-43E2-AB2F-B90AF26B5E84}">
       <p14:sectionLst xmlns:p14="http://schemas.microsoft.com/office/powerpoint/2010/main">
-        <p14:section name="Opening" id="{41eb9243-c8f0-47f9-ba4a-3e606267bed8}">
+        <p14:section name="Opening" id="{0888399e-3826-3392-2f90-fb950326a8eb}">
           <p14:sldIdLst>
             <p14:sldId id="256"/>
             <p14:sldId id="257"/>
@@ -139,7 +139,7 @@
             <p14:sldId id="262"/>
           </p14:sldIdLst>
         </p14:section>
-        <p14:section name="Block A" id="{427754d1-64c0-7cac-4634-909f8b222551}">
+        <p14:section name="Block A" id="{a37e76ef-b49e-0160-49d4-c538406ace4b}">
           <p14:sldIdLst>
             <p14:sldId id="263"/>
             <p14:sldId id="264"/>
@@ -149,15 +149,15 @@
             <p14:sldId id="269"/>
           </p14:sldIdLst>
         </p14:section>
-        <p14:section name="Break" id="{ea14ca70-8edb-801c-ba41-611ffc76bbc7}">
+        <p14:section name="Break" id="{5a6706cd-8bf1-fabe-824e-2de0f9523b77}">
           <p14:sldIdLst>
             <p14:sldId id="267"/>
           </p14:sldIdLst>
         </p14:section>
-        <p14:section name="Block A" id="{1362b2dc-35a5-d965-d9b2-1e35dbffee36}">
+        <p14:section name="Block A" id="{d6c822eb-c74d-9541-063d-d20d0a49169b}">
           <p14:sldIdLst/>
         </p14:section>
-        <p14:section name="Block B" id="{8595d331-72bd-5495-1519-d8b9a38b7803}">
+        <p14:section name="Block B" id="{9a1cb620-0026-2fc1-1457-11196b3d0768}">
           <p14:sldIdLst>
             <p14:sldId id="270"/>
             <p14:sldId id="271"/>
@@ -166,7 +166,7 @@
             <p14:sldId id="274"/>
           </p14:sldIdLst>
         </p14:section>
-        <p14:section name="Make and close" id="{b8a3e07e-e786-e6e1-3408-187a52537b2a}">
+        <p14:section name="Make and close" id="{5cdfab45-b97b-2799-f7ad-9ea47997e129}">
           <p14:sldIdLst>
             <p14:sldId id="275"/>
             <p14:sldId id="276"/>
@@ -3197,7 +3197,24 @@
                 <a:ea typeface="Lato" pitchFamily="34" charset="-122"/>
                 <a:cs typeface="Lato" pitchFamily="34" charset="-120"/>
               </a:rPr>
-              <a:t>Mean, median, range and proportions</a:t>
+              <a:t>Mean, median, range</a:t>
+            </a:r>
+            <a:endParaRPr lang="en-US" sz="5600" dirty="0"/>
+          </a:p>
+          <a:p>
+            <a:pPr algn="l" indent="0" marL="0">
+              <a:buNone/>
+            </a:pPr>
+            <a:r>
+              <a:rPr lang="en-US" sz="5600" b="1" dirty="0">
+                <a:solidFill>
+                  <a:srgbClr val="FFFFFF"/>
+                </a:solidFill>
+                <a:latin typeface="Lato" pitchFamily="34" charset="0"/>
+                <a:ea typeface="Lato" pitchFamily="34" charset="-122"/>
+                <a:cs typeface="Lato" pitchFamily="34" charset="-120"/>
+              </a:rPr>
+              <a:t>and proportions</a:t>
             </a:r>
             <a:endParaRPr lang="en-US" sz="5600" dirty="0"/>
           </a:p>
@@ -4394,11 +4411,11 @@
         <p:spPr>
           <a:xfrm>
             <a:off x="640080" y="1645920"/>
-            <a:ext cx="10881360" cy="3344672"/>
+            <a:ext cx="10881360" cy="2007362"/>
           </a:xfrm>
           <a:prstGeom prst="roundRect">
             <a:avLst>
-              <a:gd name="adj" fmla="val 2187"/>
+              <a:gd name="adj" fmla="val 3644"/>
             </a:avLst>
           </a:prstGeom>
           <a:solidFill>
@@ -4416,7 +4433,7 @@
         <p:spPr>
           <a:xfrm>
             <a:off x="841248" y="1847088"/>
-            <a:ext cx="10479024" cy="2942336"/>
+            <a:ext cx="10479024" cy="1605026"/>
           </a:xfrm>
           <a:prstGeom prst="rect">
             <a:avLst/>
@@ -4430,12 +4447,12 @@
           <a:p>
             <a:pPr algn="l" indent="0" marL="0">
               <a:lnSpc>
-                <a:spcPts val="2860"/>
+                <a:spcPts val="2470"/>
               </a:lnSpc>
               <a:buNone/>
             </a:pPr>
             <a:r>
-              <a:rPr lang="en-US" sz="2200" dirty="0">
+              <a:rPr lang="en-US" sz="1900" dirty="0">
                 <a:solidFill>
                   <a:srgbClr val="FFFFFF"/>
                 </a:solidFill>
@@ -4445,17 +4462,17 @@
               </a:rPr>
               <a:t>small = pd.Series([10, 12, 14, 16])</a:t>
             </a:r>
-            <a:endParaRPr lang="en-US" sz="2200" dirty="0"/>
+            <a:endParaRPr lang="en-US" sz="1900" dirty="0"/>
           </a:p>
           <a:p>
             <a:pPr algn="l" indent="0" marL="0">
               <a:lnSpc>
-                <a:spcPts val="2860"/>
+                <a:spcPts val="2470"/>
               </a:lnSpc>
               <a:buNone/>
             </a:pPr>
             <a:r>
-              <a:rPr lang="en-US" sz="2200" dirty="0">
+              <a:rPr lang="en-US" sz="1900" dirty="0">
                 <a:solidFill>
                   <a:srgbClr val="FFFFFF"/>
                 </a:solidFill>
@@ -4465,17 +4482,17 @@
               </a:rPr>
               <a:t>bigger = pd.Series([10, 12, 14, 16, 100])</a:t>
             </a:r>
-            <a:endParaRPr lang="en-US" sz="2200" dirty="0"/>
+            <a:endParaRPr lang="en-US" sz="1900" dirty="0"/>
           </a:p>
           <a:p>
             <a:pPr algn="l" indent="0" marL="0">
               <a:lnSpc>
-                <a:spcPts val="2860"/>
+                <a:spcPts val="2470"/>
               </a:lnSpc>
               <a:buNone/>
             </a:pPr>
             <a:r>
-              <a:rPr lang="en-US" sz="2200" dirty="0">
+              <a:rPr lang="en-US" sz="1900" dirty="0">
                 <a:solidFill>
                   <a:srgbClr val="FFFFFF"/>
                 </a:solidFill>
@@ -4483,19 +4500,19 @@
                 <a:ea typeface="Courier New" pitchFamily="34" charset="-122"/>
                 <a:cs typeface="Courier New" pitchFamily="34" charset="-120"/>
               </a:rPr>
-              <a:t>print(</a:t>
-            </a:r>
-            <a:endParaRPr lang="en-US" sz="2200" dirty="0"/>
+              <a:t>print(small.mean(), small.median(), bigger.mean(), bigger.median())</a:t>
+            </a:r>
+            <a:endParaRPr lang="en-US" sz="1900" dirty="0"/>
           </a:p>
           <a:p>
             <a:pPr algn="l" indent="0" marL="0">
               <a:lnSpc>
-                <a:spcPts val="2860"/>
+                <a:spcPts val="2470"/>
               </a:lnSpc>
               <a:buNone/>
             </a:pPr>
             <a:r>
-              <a:rPr lang="en-US" sz="2200" dirty="0">
+              <a:rPr lang="en-US" sz="1900" dirty="0">
                 <a:solidFill>
                   <a:srgbClr val="FFFFFF"/>
                 </a:solidFill>
@@ -4503,19 +4520,19 @@
                 <a:ea typeface="Courier New" pitchFamily="34" charset="-122"/>
                 <a:cs typeface="Courier New" pitchFamily="34" charset="-120"/>
               </a:rPr>
-              <a:t>    small.mean(), small.median(), bigger.mean(),</a:t>
-            </a:r>
-            <a:endParaRPr lang="en-US" sz="2200" dirty="0"/>
+              <a:t>share_big = (units &gt;= 5).sum() / len(units)</a:t>
+            </a:r>
+            <a:endParaRPr lang="en-US" sz="1900" dirty="0"/>
           </a:p>
           <a:p>
             <a:pPr algn="l" indent="0" marL="0">
               <a:lnSpc>
-                <a:spcPts val="2860"/>
+                <a:spcPts val="2470"/>
               </a:lnSpc>
               <a:buNone/>
             </a:pPr>
             <a:r>
-              <a:rPr lang="en-US" sz="2200" dirty="0">
+              <a:rPr lang="en-US" sz="1900" dirty="0">
                 <a:solidFill>
                   <a:srgbClr val="FFFFFF"/>
                 </a:solidFill>
@@ -4523,69 +4540,9 @@
                 <a:ea typeface="Courier New" pitchFamily="34" charset="-122"/>
                 <a:cs typeface="Courier New" pitchFamily="34" charset="-120"/>
               </a:rPr>
-              <a:t>    bigger.median()</a:t>
-            </a:r>
-            <a:endParaRPr lang="en-US" sz="2200" dirty="0"/>
-          </a:p>
-          <a:p>
-            <a:pPr algn="l" indent="0" marL="0">
-              <a:lnSpc>
-                <a:spcPts val="2860"/>
-              </a:lnSpc>
-              <a:buNone/>
-            </a:pPr>
-            <a:r>
-              <a:rPr lang="en-US" sz="2200" dirty="0">
-                <a:solidFill>
-                  <a:srgbClr val="FFFFFF"/>
-                </a:solidFill>
-                <a:latin typeface="Courier New" pitchFamily="34" charset="0"/>
-                <a:ea typeface="Courier New" pitchFamily="34" charset="-122"/>
-                <a:cs typeface="Courier New" pitchFamily="34" charset="-120"/>
-              </a:rPr>
-              <a:t>)</a:t>
-            </a:r>
-            <a:endParaRPr lang="en-US" sz="2200" dirty="0"/>
-          </a:p>
-          <a:p>
-            <a:pPr algn="l" indent="0" marL="0">
-              <a:lnSpc>
-                <a:spcPts val="2860"/>
-              </a:lnSpc>
-              <a:buNone/>
-            </a:pPr>
-            <a:r>
-              <a:rPr lang="en-US" sz="2200" dirty="0">
-                <a:solidFill>
-                  <a:srgbClr val="FFFFFF"/>
-                </a:solidFill>
-                <a:latin typeface="Courier New" pitchFamily="34" charset="0"/>
-                <a:ea typeface="Courier New" pitchFamily="34" charset="-122"/>
-                <a:cs typeface="Courier New" pitchFamily="34" charset="-120"/>
-              </a:rPr>
-              <a:t>share_big = (units &gt;= 5).sum() / len(units)</a:t>
-            </a:r>
-            <a:endParaRPr lang="en-US" sz="2200" dirty="0"/>
-          </a:p>
-          <a:p>
-            <a:pPr algn="l" indent="0" marL="0">
-              <a:lnSpc>
-                <a:spcPts val="2860"/>
-              </a:lnSpc>
-              <a:buNone/>
-            </a:pPr>
-            <a:r>
-              <a:rPr lang="en-US" sz="2200" dirty="0">
-                <a:solidFill>
-                  <a:srgbClr val="FFFFFF"/>
-                </a:solidFill>
-                <a:latin typeface="Courier New" pitchFamily="34" charset="0"/>
-                <a:ea typeface="Courier New" pitchFamily="34" charset="-122"/>
-                <a:cs typeface="Courier New" pitchFamily="34" charset="-120"/>
-              </a:rPr>
               <a:t>print(share_big, share_big * 100)</a:t>
             </a:r>
-            <a:endParaRPr lang="en-US" sz="2200" dirty="0"/>
+            <a:endParaRPr lang="en-US" sz="1900" dirty="0"/>
           </a:p>
         </p:txBody>
       </p:sp>
@@ -4597,8 +4554,8 @@
         </p:nvSpPr>
         <p:spPr>
           <a:xfrm>
-            <a:off x="640080" y="5173472"/>
-            <a:ext cx="8046720" cy="1090168"/>
+            <a:off x="640080" y="3836162"/>
+            <a:ext cx="8046720" cy="2427478"/>
           </a:xfrm>
           <a:prstGeom prst="rect">
             <a:avLst/>
@@ -4612,7 +4569,7 @@
           <a:p>
             <a:pPr algn="l" indent="0" marL="0">
               <a:lnSpc>
-                <a:spcPts val="2400"/>
+                <a:spcPts val="3120"/>
               </a:lnSpc>
               <a:spcAft>
                 <a:spcPts val="1010"/>
@@ -4620,7 +4577,7 @@
               <a:buNone/>
             </a:pPr>
             <a:r>
-              <a:rPr lang="en-US" sz="2000" dirty="0">
+              <a:rPr lang="en-US" sz="2600" dirty="0">
                 <a:solidFill>
                   <a:srgbClr val="111111"/>
                 </a:solidFill>
@@ -4630,12 +4587,12 @@
               </a:rPr>
               <a:t>Predict which moves more when 100 joins the list: the mean or the median.</a:t>
             </a:r>
-            <a:endParaRPr lang="en-US" sz="2000" dirty="0"/>
+            <a:endParaRPr lang="en-US" sz="2600" dirty="0"/>
           </a:p>
           <a:p>
             <a:pPr algn="l" indent="0" marL="0">
               <a:lnSpc>
-                <a:spcPts val="2400"/>
+                <a:spcPts val="3120"/>
               </a:lnSpc>
               <a:spcAft>
                 <a:spcPts val="1010"/>
@@ -4643,7 +4600,7 @@
               <a:buNone/>
             </a:pPr>
             <a:r>
-              <a:rPr lang="en-US" sz="2000" dirty="0">
+              <a:rPr lang="en-US" sz="2600" dirty="0">
                 <a:solidFill>
                   <a:srgbClr val="111111"/>
                 </a:solidFill>
@@ -4653,7 +4610,7 @@
               </a:rPr>
               <a:t>Write your guess on paper before we run it.</a:t>
             </a:r>
-            <a:endParaRPr lang="en-US" sz="2000" dirty="0"/>
+            <a:endParaRPr lang="en-US" sz="2600" dirty="0"/>
           </a:p>
         </p:txBody>
       </p:sp>
@@ -4673,7 +4630,7 @@
         </p:blipFill>
         <p:spPr>
           <a:xfrm>
-            <a:off x="10241280" y="5175758"/>
+            <a:off x="10241280" y="5031486"/>
             <a:ext cx="1188720" cy="1046988"/>
           </a:xfrm>
           <a:prstGeom prst="rect">
@@ -5885,15 +5842,15 @@
           <a:p>
             <a:pPr algn="l" indent="0" marL="0">
               <a:lnSpc>
-                <a:spcPts val="3600"/>
+                <a:spcPts val="3360"/>
               </a:lnSpc>
               <a:spcAft>
-                <a:spcPts val="2520"/>
+                <a:spcPts val="2020"/>
               </a:spcAft>
               <a:buNone/>
             </a:pPr>
             <a:r>
-              <a:rPr lang="en-US" sz="3000" dirty="0">
+              <a:rPr lang="en-US" sz="2800" dirty="0">
                 <a:solidFill>
                   <a:srgbClr val="111111"/>
                 </a:solidFill>
@@ -5901,22 +5858,22 @@
                 <a:ea typeface="Lato" pitchFamily="34" charset="-122"/>
                 <a:cs typeface="Lato" pitchFamily="34" charset="-120"/>
               </a:rPr>
-              <a:t>Compare 12 successes out of 20 attempts with 15 out of 50. Calculate each percentage and explain why the larger count does not have to mean the better rate.</a:t>
-            </a:r>
-            <a:endParaRPr lang="en-US" sz="3000" dirty="0"/>
+              <a:t>Compare 12 successes out of 20 attempts with 15 out of 50.</a:t>
+            </a:r>
+            <a:endParaRPr lang="en-US" sz="2800" dirty="0"/>
           </a:p>
           <a:p>
             <a:pPr algn="l" indent="0" marL="0">
               <a:lnSpc>
-                <a:spcPts val="3600"/>
+                <a:spcPts val="3360"/>
               </a:lnSpc>
               <a:spcAft>
-                <a:spcPts val="2520"/>
+                <a:spcPts val="2020"/>
               </a:spcAft>
               <a:buNone/>
             </a:pPr>
             <a:r>
-              <a:rPr lang="en-US" sz="3000" dirty="0">
+              <a:rPr lang="en-US" sz="2800" dirty="0">
                 <a:solidFill>
                   <a:srgbClr val="111111"/>
                 </a:solidFill>
@@ -5924,9 +5881,32 @@
                 <a:ea typeface="Lato" pitchFamily="34" charset="-122"/>
                 <a:cs typeface="Lato" pitchFamily="34" charset="-120"/>
               </a:rPr>
+              <a:t>Calculate each percentage and explain why the larger count does not have to mean the better rate.</a:t>
+            </a:r>
+            <a:endParaRPr lang="en-US" sz="2800" dirty="0"/>
+          </a:p>
+          <a:p>
+            <a:pPr algn="l" indent="0" marL="0">
+              <a:lnSpc>
+                <a:spcPts val="3360"/>
+              </a:lnSpc>
+              <a:spcAft>
+                <a:spcPts val="2020"/>
+              </a:spcAft>
+              <a:buNone/>
+            </a:pPr>
+            <a:r>
+              <a:rPr lang="en-US" sz="2800" dirty="0">
+                <a:solidFill>
+                  <a:srgbClr val="111111"/>
+                </a:solidFill>
+                <a:latin typeface="Lato" pitchFamily="34" charset="0"/>
+                <a:ea typeface="Lato" pitchFamily="34" charset="-122"/>
+                <a:cs typeface="Lato" pitchFamily="34" charset="-120"/>
+              </a:rPr>
               <a:t>Save it as ML09. Write two sentences: what you changed and how you checked it.</a:t>
             </a:r>
-            <a:endParaRPr lang="en-US" sz="3000" dirty="0"/>
+            <a:endParaRPr lang="en-US" sz="2800" dirty="0"/>
           </a:p>
         </p:txBody>
       </p:sp>
